--- a/edu-agent/artifacts/ferrari/ferrari.pptx
+++ b/edu-agent/artifacts/ferrari/ferrari.pptx
@@ -720,7 +720,7 @@
           <p:spPr>
             <a:xfrm>
               <a:off x="676656" y="2038350"/>
-              <a:ext cx="2899382" cy="352044"/>
+              <a:ext cx="2273708" cy="352044"/>
             </a:xfrm>
             <a:prstGeom prst="rect">
               <a:avLst/>
@@ -746,7 +746,7 @@
                   <a:ea typeface="+mn-ea"/>
                   <a:cs typeface="+mn-cs"/>
                 </a:rPr>
-                <a:t>SCUDERIA · 2026</a:t>
+                <a:t>SEASON 2004</a:t>
               </a:r>
             </a:p>
           </p:txBody>
